--- a/examples/ppt/transitions/transitions-dynamic.pptx
+++ b/examples/ppt/transitions/transitions-dynamic.pptx
@@ -5,30 +5,31 @@
     <p:sldMasterId xmlns:r="http://schemas.openxmlformats.org/officeDocument/2006/relationships" id="2147483648" r:id="rId1"/>
   </p:sldMasterIdLst>
   <p:sldIdLst>
-    <p:sldId id="256" r:id="R681c20fa49364065"/>
-    <p:sldId id="257" r:id="Rfedc3f8b70df44ca"/>
-    <p:sldId id="258" r:id="R3f26c2e8cc4d4fd1"/>
-    <p:sldId id="259" r:id="R38befbdf8bd84f65"/>
-    <p:sldId id="260" r:id="Rdee019a3b5c14648"/>
-    <p:sldId id="261" r:id="R6a7853795534406a"/>
-    <p:sldId id="262" r:id="Rdd36c3f8864145ca"/>
-    <p:sldId id="263" r:id="R971c7cfc1f7140ae"/>
-    <p:sldId id="264" r:id="R19f95746628e478c"/>
-    <p:sldId id="265" r:id="R850503f197e24b83"/>
-    <p:sldId id="266" r:id="R70a4b0feaa6c4748"/>
-    <p:sldId id="267" r:id="R47734b6b8d1f467f"/>
-    <p:sldId id="268" r:id="R46b3e5ff418840a8"/>
-    <p:sldId id="269" r:id="Rccfe893c03d84bed"/>
-    <p:sldId id="270" r:id="Reb4cdcbec7cb4b6a"/>
-    <p:sldId id="271" r:id="R6f962a73136f41e4"/>
-    <p:sldId id="272" r:id="R0692683efc6440ea"/>
-    <p:sldId id="273" r:id="Rbe3dd982a810423e"/>
-    <p:sldId id="274" r:id="Ref750a6d82ec43a1"/>
-    <p:sldId id="275" r:id="R19435abcc5954b34"/>
-    <p:sldId id="276" r:id="R9dc47f3de1964150"/>
-    <p:sldId id="277" r:id="Rc147f82405d54248"/>
-    <p:sldId id="278" r:id="R56a4fe53caca4b82"/>
-    <p:sldId id="279" r:id="Rc4bbca27c83e4db5"/>
+    <p:sldId id="256" r:id="Ref513911b7c14c94"/>
+    <p:sldId id="257" r:id="R5140933f86aa479b"/>
+    <p:sldId id="258" r:id="R7a543e2f093c4fad"/>
+    <p:sldId id="259" r:id="R900fa45e75cf47db"/>
+    <p:sldId id="260" r:id="R99dd4893df4f42e3"/>
+    <p:sldId id="261" r:id="Rb154578f04ee431b"/>
+    <p:sldId id="262" r:id="Rd41b2c4ffe2947e3"/>
+    <p:sldId id="263" r:id="R39f1c0e3e1e14601"/>
+    <p:sldId id="264" r:id="R7044a777a18e48d0"/>
+    <p:sldId id="265" r:id="Rcfe042106df44c88"/>
+    <p:sldId id="266" r:id="Rcabe10f1e9dd4ad7"/>
+    <p:sldId id="267" r:id="R3a56b7cb1bc14eab"/>
+    <p:sldId id="268" r:id="R5e758e7e60c94ad2"/>
+    <p:sldId id="269" r:id="R69607190b3744174"/>
+    <p:sldId id="270" r:id="R088333624c4842ec"/>
+    <p:sldId id="271" r:id="R1b5d5d544d5142ef"/>
+    <p:sldId id="272" r:id="Rbcee5c76f9be4626"/>
+    <p:sldId id="273" r:id="Ref6b874d44bc49bb"/>
+    <p:sldId id="274" r:id="Rf7e1ca4344e94946"/>
+    <p:sldId id="275" r:id="R8035f43cb94444e4"/>
+    <p:sldId id="276" r:id="Rbde77ea162e2486f"/>
+    <p:sldId id="277" r:id="R720ae6c46c3841d5"/>
+    <p:sldId id="278" r:id="Re3854aeaeaba4c77"/>
+    <p:sldId id="279" r:id="R6512e61928f24115"/>
+    <p:sldId id="280" r:id="R0ca49df8ace5487d"/>
   </p:sldIdLst>
   <p:sldSz cx="12192000" cy="6858000"/>
   <p:notesSz cx="6858000" cy="9144000"/>
@@ -1034,7 +1035,7 @@
             <a:avLst/>
           </a:prstGeom>
           <a:solidFill xmlns:a="http://schemas.openxmlformats.org/drawingml/2006/main">
-            <a:srgbClr val="8A5A2B"/>
+            <a:srgbClr val="6E3B23"/>
           </a:solidFill>
         </p:spPr>
         <p:txBody>
@@ -1074,7 +1075,7 @@
                   <a:srgbClr val="FFFFFF"/>
                 </a:solidFill>
               </a:rPr>
-              <a:t>prism-up</a:t>
+              <a:t>prism (== Cube in UI)</a:t>
             </a:r>
           </a:p>
         </p:txBody>
@@ -1121,7 +1122,7 @@
             <a:avLst/>
           </a:prstGeom>
           <a:solidFill xmlns:a="http://schemas.openxmlformats.org/drawingml/2006/main">
-            <a:srgbClr val="8A5A2B"/>
+            <a:srgbClr val="6E3B23"/>
           </a:solidFill>
         </p:spPr>
         <p:txBody>
@@ -1161,7 +1162,7 @@
                   <a:srgbClr val="FFFFFF"/>
                 </a:solidFill>
               </a:rPr>
-              <a:t>prism-right</a:t>
+              <a:t>rotate</a:t>
             </a:r>
           </a:p>
         </p:txBody>
@@ -1171,7 +1172,7 @@
   <mc:AlternateContent>
     <mc:Choice Requires="p14">
       <p:transition xmlns:p14="http://schemas.microsoft.com/office/powerpoint/2010/main">
-        <p14:prism/>
+        <p14:prism isContent="1"/>
       </p:transition>
     </mc:Choice>
     <mc:Fallback>
@@ -1208,7 +1209,7 @@
             <a:avLst/>
           </a:prstGeom>
           <a:solidFill xmlns:a="http://schemas.openxmlformats.org/drawingml/2006/main">
-            <a:srgbClr val="7030A0"/>
+            <a:srgbClr val="6E3B23"/>
           </a:solidFill>
         </p:spPr>
         <p:txBody>
@@ -1225,6 +1226,180 @@
       <p:sp>
         <p:nvSpPr>
           <p:cNvPr id="10037" name="TextBox 2"/>
+          <p:cNvSpPr txBox="1"/>
+          <p:nvPr/>
+        </p:nvSpPr>
+        <p:spPr>
+          <a:xfrm xmlns:a="http://schemas.openxmlformats.org/drawingml/2006/main">
+            <a:off x="720000" y="2520000"/>
+            <a:ext cx="10753200" cy="1440000"/>
+          </a:xfrm>
+          <a:prstGeom xmlns:a="http://schemas.openxmlformats.org/drawingml/2006/main" prst="rect">
+            <a:avLst/>
+          </a:prstGeom>
+        </p:spPr>
+        <p:txBody>
+          <a:bodyPr xmlns:a="http://schemas.openxmlformats.org/drawingml/2006/main"/>
+          <a:lstStyle xmlns:a="http://schemas.openxmlformats.org/drawingml/2006/main"/>
+          <a:p xmlns:a="http://schemas.openxmlformats.org/drawingml/2006/main">
+            <a:pPr algn="ctr"/>
+            <a:r>
+              <a:rPr lang="en-US" sz="4000" b="1">
+                <a:solidFill>
+                  <a:srgbClr val="FFFFFF"/>
+                </a:solidFill>
+              </a:rPr>
+              <a:t>orbit</a:t>
+            </a:r>
+          </a:p>
+        </p:txBody>
+      </p:sp>
+    </p:spTree>
+  </p:cSld>
+  <mc:AlternateContent>
+    <mc:Choice Requires="p14">
+      <p:transition xmlns:p14="http://schemas.microsoft.com/office/powerpoint/2010/main">
+        <p14:prism isContent="1" isInverted="1"/>
+      </p:transition>
+    </mc:Choice>
+    <mc:Fallback>
+      <p:transition>
+        <p:fade/>
+      </p:transition>
+    </mc:Fallback>
+  </mc:AlternateContent>
+</p:sld>
+</file>
+
+<file path=ppt/slides/slide2.xml><?xml version="1.0" encoding="utf-8"?>
+<p:sld xmlns:p14="http://schemas.microsoft.com/office/powerpoint/2010/main" xmlns:mc="http://schemas.openxmlformats.org/markup-compatibility/2006" xmlns:p="http://schemas.openxmlformats.org/presentationml/2006/main" mc:Ignorable="p14">
+  <p:cSld>
+    <p:spTree>
+      <p:nvGrpSpPr>
+        <p:cNvPr id="1" name=""/>
+        <p:cNvGrpSpPr/>
+        <p:nvPr/>
+      </p:nvGrpSpPr>
+      <p:grpSpPr/>
+      <p:sp>
+        <p:nvSpPr>
+          <p:cNvPr id="10002" name="TextBox 1"/>
+          <p:cNvSpPr/>
+          <p:nvPr/>
+        </p:nvSpPr>
+        <p:spPr>
+          <a:xfrm xmlns:a="http://schemas.openxmlformats.org/drawingml/2006/main">
+            <a:off x="0" y="0"/>
+            <a:ext cx="12193200" cy="6858000"/>
+          </a:xfrm>
+          <a:prstGeom xmlns:a="http://schemas.openxmlformats.org/drawingml/2006/main" prst="rect">
+            <a:avLst/>
+          </a:prstGeom>
+          <a:solidFill xmlns:a="http://schemas.openxmlformats.org/drawingml/2006/main">
+            <a:srgbClr val="2E5C8A"/>
+          </a:solidFill>
+        </p:spPr>
+        <p:txBody>
+          <a:bodyPr xmlns:a="http://schemas.openxmlformats.org/drawingml/2006/main"/>
+          <a:lstStyle xmlns:a="http://schemas.openxmlformats.org/drawingml/2006/main"/>
+          <a:p xmlns:a="http://schemas.openxmlformats.org/drawingml/2006/main">
+            <a:r>
+              <a:rPr lang="en-US"/>
+              <a:t/>
+            </a:r>
+          </a:p>
+        </p:txBody>
+      </p:sp>
+      <p:sp>
+        <p:nvSpPr>
+          <p:cNvPr id="10003" name="TextBox 2"/>
+          <p:cNvSpPr txBox="1"/>
+          <p:nvPr/>
+        </p:nvSpPr>
+        <p:spPr>
+          <a:xfrm xmlns:a="http://schemas.openxmlformats.org/drawingml/2006/main">
+            <a:off x="720000" y="2520000"/>
+            <a:ext cx="10753200" cy="1440000"/>
+          </a:xfrm>
+          <a:prstGeom xmlns:a="http://schemas.openxmlformats.org/drawingml/2006/main" prst="rect">
+            <a:avLst/>
+          </a:prstGeom>
+        </p:spPr>
+        <p:txBody>
+          <a:bodyPr xmlns:a="http://schemas.openxmlformats.org/drawingml/2006/main"/>
+          <a:lstStyle xmlns:a="http://schemas.openxmlformats.org/drawingml/2006/main"/>
+          <a:p xmlns:a="http://schemas.openxmlformats.org/drawingml/2006/main">
+            <a:pPr algn="ctr"/>
+            <a:r>
+              <a:rPr lang="en-US" sz="4000" b="1">
+                <a:solidFill>
+                  <a:srgbClr val="FFFFFF"/>
+                </a:solidFill>
+              </a:rPr>
+              <a:t>switch-right</a:t>
+            </a:r>
+          </a:p>
+        </p:txBody>
+      </p:sp>
+    </p:spTree>
+  </p:cSld>
+  <mc:AlternateContent>
+    <mc:Choice Requires="p14">
+      <p:transition xmlns:p14="http://schemas.microsoft.com/office/powerpoint/2010/main">
+        <p14:switch dir="r"/>
+      </p:transition>
+    </mc:Choice>
+    <mc:Fallback>
+      <p:transition>
+        <p:fade/>
+      </p:transition>
+    </mc:Fallback>
+  </mc:AlternateContent>
+</p:sld>
+</file>
+
+<file path=ppt/slides/slide20.xml><?xml version="1.0" encoding="utf-8"?>
+<p:sld xmlns:p14="http://schemas.microsoft.com/office/powerpoint/2010/main" xmlns:mc="http://schemas.openxmlformats.org/markup-compatibility/2006" xmlns:p="http://schemas.openxmlformats.org/presentationml/2006/main" mc:Ignorable="p14">
+  <p:cSld>
+    <p:spTree>
+      <p:nvGrpSpPr>
+        <p:cNvPr id="1" name=""/>
+        <p:cNvGrpSpPr/>
+        <p:nvPr/>
+      </p:nvGrpSpPr>
+      <p:grpSpPr/>
+      <p:sp>
+        <p:nvSpPr>
+          <p:cNvPr id="10038" name="TextBox 1"/>
+          <p:cNvSpPr/>
+          <p:nvPr/>
+        </p:nvSpPr>
+        <p:spPr>
+          <a:xfrm xmlns:a="http://schemas.openxmlformats.org/drawingml/2006/main">
+            <a:off x="0" y="0"/>
+            <a:ext cx="12193200" cy="6858000"/>
+          </a:xfrm>
+          <a:prstGeom xmlns:a="http://schemas.openxmlformats.org/drawingml/2006/main" prst="rect">
+            <a:avLst/>
+          </a:prstGeom>
+          <a:solidFill xmlns:a="http://schemas.openxmlformats.org/drawingml/2006/main">
+            <a:srgbClr val="7030A0"/>
+          </a:solidFill>
+        </p:spPr>
+        <p:txBody>
+          <a:bodyPr xmlns:a="http://schemas.openxmlformats.org/drawingml/2006/main"/>
+          <a:lstStyle xmlns:a="http://schemas.openxmlformats.org/drawingml/2006/main"/>
+          <a:p xmlns:a="http://schemas.openxmlformats.org/drawingml/2006/main">
+            <a:r>
+              <a:rPr lang="en-US"/>
+              <a:t/>
+            </a:r>
+          </a:p>
+        </p:txBody>
+      </p:sp>
+      <p:sp>
+        <p:nvSpPr>
+          <p:cNvPr id="10039" name="TextBox 2"/>
           <p:cNvSpPr txBox="1"/>
           <p:nvPr/>
         </p:nvSpPr>
@@ -1270,7 +1445,7 @@
 </p:sld>
 </file>
 
-<file path=ppt/slides/slide2.xml><?xml version="1.0" encoding="utf-8"?>
+<file path=ppt/slides/slide21.xml><?xml version="1.0" encoding="utf-8"?>
 <p:sld xmlns:p14="http://schemas.microsoft.com/office/powerpoint/2010/main" xmlns:mc="http://schemas.openxmlformats.org/markup-compatibility/2006" xmlns:p="http://schemas.openxmlformats.org/presentationml/2006/main" mc:Ignorable="p14">
   <p:cSld>
     <p:spTree>
@@ -1282,7 +1457,7 @@
       <p:grpSpPr/>
       <p:sp>
         <p:nvSpPr>
-          <p:cNvPr id="10002" name="TextBox 1"/>
+          <p:cNvPr id="10040" name="TextBox 1"/>
           <p:cNvSpPr/>
           <p:nvPr/>
         </p:nvSpPr>
@@ -1295,7 +1470,7 @@
             <a:avLst/>
           </a:prstGeom>
           <a:solidFill xmlns:a="http://schemas.openxmlformats.org/drawingml/2006/main">
-            <a:srgbClr val="2E5C8A"/>
+            <a:srgbClr val="7030A0"/>
           </a:solidFill>
         </p:spPr>
         <p:txBody>
@@ -1311,94 +1486,7 @@
       </p:sp>
       <p:sp>
         <p:nvSpPr>
-          <p:cNvPr id="10003" name="TextBox 2"/>
-          <p:cNvSpPr txBox="1"/>
-          <p:nvPr/>
-        </p:nvSpPr>
-        <p:spPr>
-          <a:xfrm xmlns:a="http://schemas.openxmlformats.org/drawingml/2006/main">
-            <a:off x="720000" y="2520000"/>
-            <a:ext cx="10753200" cy="1440000"/>
-          </a:xfrm>
-          <a:prstGeom xmlns:a="http://schemas.openxmlformats.org/drawingml/2006/main" prst="rect">
-            <a:avLst/>
-          </a:prstGeom>
-        </p:spPr>
-        <p:txBody>
-          <a:bodyPr xmlns:a="http://schemas.openxmlformats.org/drawingml/2006/main"/>
-          <a:lstStyle xmlns:a="http://schemas.openxmlformats.org/drawingml/2006/main"/>
-          <a:p xmlns:a="http://schemas.openxmlformats.org/drawingml/2006/main">
-            <a:pPr algn="ctr"/>
-            <a:r>
-              <a:rPr lang="en-US" sz="4000" b="1">
-                <a:solidFill>
-                  <a:srgbClr val="FFFFFF"/>
-                </a:solidFill>
-              </a:rPr>
-              <a:t>switch-right</a:t>
-            </a:r>
-          </a:p>
-        </p:txBody>
-      </p:sp>
-    </p:spTree>
-  </p:cSld>
-  <mc:AlternateContent>
-    <mc:Choice Requires="p14">
-      <p:transition xmlns:p14="http://schemas.microsoft.com/office/powerpoint/2010/main">
-        <p14:switch dir="r"/>
-      </p:transition>
-    </mc:Choice>
-    <mc:Fallback>
-      <p:transition>
-        <p:fade/>
-      </p:transition>
-    </mc:Fallback>
-  </mc:AlternateContent>
-</p:sld>
-</file>
-
-<file path=ppt/slides/slide20.xml><?xml version="1.0" encoding="utf-8"?>
-<p:sld xmlns:p14="http://schemas.microsoft.com/office/powerpoint/2010/main" xmlns:mc="http://schemas.openxmlformats.org/markup-compatibility/2006" xmlns:p="http://schemas.openxmlformats.org/presentationml/2006/main" mc:Ignorable="p14">
-  <p:cSld>
-    <p:spTree>
-      <p:nvGrpSpPr>
-        <p:cNvPr id="1" name=""/>
-        <p:cNvGrpSpPr/>
-        <p:nvPr/>
-      </p:nvGrpSpPr>
-      <p:grpSpPr/>
-      <p:sp>
-        <p:nvSpPr>
-          <p:cNvPr id="10038" name="TextBox 1"/>
-          <p:cNvSpPr/>
-          <p:nvPr/>
-        </p:nvSpPr>
-        <p:spPr>
-          <a:xfrm xmlns:a="http://schemas.openxmlformats.org/drawingml/2006/main">
-            <a:off x="0" y="0"/>
-            <a:ext cx="12193200" cy="6858000"/>
-          </a:xfrm>
-          <a:prstGeom xmlns:a="http://schemas.openxmlformats.org/drawingml/2006/main" prst="rect">
-            <a:avLst/>
-          </a:prstGeom>
-          <a:solidFill xmlns:a="http://schemas.openxmlformats.org/drawingml/2006/main">
-            <a:srgbClr val="7030A0"/>
-          </a:solidFill>
-        </p:spPr>
-        <p:txBody>
-          <a:bodyPr xmlns:a="http://schemas.openxmlformats.org/drawingml/2006/main"/>
-          <a:lstStyle xmlns:a="http://schemas.openxmlformats.org/drawingml/2006/main"/>
-          <a:p xmlns:a="http://schemas.openxmlformats.org/drawingml/2006/main">
-            <a:r>
-              <a:rPr lang="en-US"/>
-              <a:t/>
-            </a:r>
-          </a:p>
-        </p:txBody>
-      </p:sp>
-      <p:sp>
-        <p:nvSpPr>
-          <p:cNvPr id="10039" name="TextBox 2"/>
+          <p:cNvPr id="10041" name="TextBox 2"/>
           <p:cNvSpPr txBox="1"/>
           <p:nvPr/>
         </p:nvSpPr>
@@ -1444,7 +1532,7 @@
 </p:sld>
 </file>
 
-<file path=ppt/slides/slide21.xml><?xml version="1.0" encoding="utf-8"?>
+<file path=ppt/slides/slide22.xml><?xml version="1.0" encoding="utf-8"?>
 <p:sld xmlns:p14="http://schemas.microsoft.com/office/powerpoint/2010/main" xmlns:mc="http://schemas.openxmlformats.org/markup-compatibility/2006" xmlns:p="http://schemas.openxmlformats.org/presentationml/2006/main" mc:Ignorable="p14">
   <p:cSld>
     <p:spTree>
@@ -1456,7 +1544,7 @@
       <p:grpSpPr/>
       <p:sp>
         <p:nvSpPr>
-          <p:cNvPr id="10040" name="TextBox 1"/>
+          <p:cNvPr id="10042" name="TextBox 1"/>
           <p:cNvSpPr/>
           <p:nvPr/>
         </p:nvSpPr>
@@ -1485,7 +1573,7 @@
       </p:sp>
       <p:sp>
         <p:nvSpPr>
-          <p:cNvPr id="10041" name="TextBox 2"/>
+          <p:cNvPr id="10043" name="TextBox 2"/>
           <p:cNvSpPr txBox="1"/>
           <p:nvPr/>
         </p:nvSpPr>
@@ -1531,7 +1619,7 @@
 </p:sld>
 </file>
 
-<file path=ppt/slides/slide22.xml><?xml version="1.0" encoding="utf-8"?>
+<file path=ppt/slides/slide23.xml><?xml version="1.0" encoding="utf-8"?>
 <p:sld xmlns:p14="http://schemas.microsoft.com/office/powerpoint/2010/main" xmlns:mc="http://schemas.openxmlformats.org/markup-compatibility/2006" xmlns:p="http://schemas.openxmlformats.org/presentationml/2006/main" mc:Ignorable="p14">
   <p:cSld>
     <p:spTree>
@@ -1543,7 +1631,7 @@
       <p:grpSpPr/>
       <p:sp>
         <p:nvSpPr>
-          <p:cNvPr id="10042" name="TextBox 1"/>
+          <p:cNvPr id="10044" name="TextBox 1"/>
           <p:cNvSpPr/>
           <p:nvPr/>
         </p:nvSpPr>
@@ -1572,7 +1660,7 @@
       </p:sp>
       <p:sp>
         <p:nvSpPr>
-          <p:cNvPr id="10043" name="TextBox 2"/>
+          <p:cNvPr id="10045" name="TextBox 2"/>
           <p:cNvSpPr txBox="1"/>
           <p:nvPr/>
         </p:nvSpPr>
@@ -1618,7 +1706,7 @@
 </p:sld>
 </file>
 
-<file path=ppt/slides/slide23.xml><?xml version="1.0" encoding="utf-8"?>
+<file path=ppt/slides/slide24.xml><?xml version="1.0" encoding="utf-8"?>
 <p:sld xmlns:p14="http://schemas.microsoft.com/office/powerpoint/2010/main" xmlns:mc="http://schemas.openxmlformats.org/markup-compatibility/2006" xmlns:p="http://schemas.openxmlformats.org/presentationml/2006/main" mc:Ignorable="p14">
   <p:cSld>
     <p:spTree>
@@ -1630,7 +1718,7 @@
       <p:grpSpPr/>
       <p:sp>
         <p:nvSpPr>
-          <p:cNvPr id="10044" name="TextBox 1"/>
+          <p:cNvPr id="10046" name="TextBox 1"/>
           <p:cNvSpPr/>
           <p:nvPr/>
         </p:nvSpPr>
@@ -1659,7 +1747,7 @@
       </p:sp>
       <p:sp>
         <p:nvSpPr>
-          <p:cNvPr id="10045" name="TextBox 2"/>
+          <p:cNvPr id="10047" name="TextBox 2"/>
           <p:cNvSpPr txBox="1"/>
           <p:nvPr/>
         </p:nvSpPr>
@@ -1705,7 +1793,7 @@
 </p:sld>
 </file>
 
-<file path=ppt/slides/slide24.xml><?xml version="1.0" encoding="utf-8"?>
+<file path=ppt/slides/slide25.xml><?xml version="1.0" encoding="utf-8"?>
 <p:sld xmlns:p14="http://schemas.microsoft.com/office/powerpoint/2010/main" xmlns:mc="http://schemas.openxmlformats.org/markup-compatibility/2006" xmlns:p="http://schemas.openxmlformats.org/presentationml/2006/main" mc:Ignorable="p14">
   <p:cSld>
     <p:spTree>
@@ -1717,7 +1805,7 @@
       <p:grpSpPr/>
       <p:sp>
         <p:nvSpPr>
-          <p:cNvPr id="10046" name="TextBox 1"/>
+          <p:cNvPr id="10048" name="TextBox 1"/>
           <p:cNvSpPr/>
           <p:nvPr/>
         </p:nvSpPr>
@@ -1746,7 +1834,7 @@
       </p:sp>
       <p:sp>
         <p:nvSpPr>
-          <p:cNvPr id="10047" name="TextBox 2"/>
+          <p:cNvPr id="10049" name="TextBox 2"/>
           <p:cNvSpPr txBox="1"/>
           <p:nvPr/>
         </p:nvSpPr>
